--- a/classes/parte-13-seguridad-movil-iot-e-inalambrica/271-seguridad-de-bluetooth-y-ble/clase-271-presentacion.pptx
+++ b/classes/parte-13-seguridad-movil-iot-e-inalambrica/271-seguridad-de-bluetooth-y-ble/clase-271-presentacion.pptx
@@ -3131,7 +3131,7 @@
                   <a:srgbClr val="0B3D2E"/>
                 </a:solidFill>
               </a:rPr>
-              <a:t>Clase 271 — Seguridad de Bluetooth y BLE</a:t>
+              <a:t>Clase 271 — Seguridad de Bluetooth, BLE y radio IoT de corto alcance</a:t>
             </a:r>
           </a:p>
           <a:p>
@@ -3202,7 +3202,7 @@
                   <a:srgbClr val="0B3D2E"/>
                 </a:solidFill>
               </a:rPr>
-              <a:t>🧪 Laboratorio guiado</a:t>
+              <a:t>🧪 Laboratorio guiado — De anuncio a autorización</a:t>
             </a:r>
           </a:p>
         </p:txBody>
@@ -3240,97 +3240,97 @@
                   <a:srgbClr val="22282E"/>
                 </a:solidFill>
               </a:rPr>
-              <a:t>•  Escanea con bluetoothctl scan on o bettercap ble.recon on y localiza tu dispositivo BLE propio.</a:t>
-            </a:r>
-          </a:p>
-          <a:p>
-            <a:pPr>
-              <a:spcAft>
-                <a:spcPts val="600"/>
-              </a:spcAft>
-            </a:pPr>
-            <a:r>
-              <a:rPr sz="1500">
-                <a:solidFill>
-                  <a:srgbClr val="22282E"/>
-                </a:solidFill>
-              </a:rPr>
-              <a:t>•  Enumera GATT: con gatttool o nRF Connect lista servicios y características, anotando handles, UUID y propiedades (read/write/notify).</a:t>
-            </a:r>
-          </a:p>
-          <a:p>
-            <a:pPr>
-              <a:spcAft>
-                <a:spcPts val="600"/>
-              </a:spcAft>
-            </a:pPr>
-            <a:r>
-              <a:rPr sz="1500">
-                <a:solidFill>
-                  <a:srgbClr val="22282E"/>
-                </a:solidFill>
-              </a:rPr>
-              <a:t>•  Lee valores: lee características legibles y correlaciona con el estado del dispositivo (p. ej. nivel de batería).</a:t>
-            </a:r>
-          </a:p>
-          <a:p>
-            <a:pPr>
-              <a:spcAft>
-                <a:spcPts val="600"/>
-              </a:spcAft>
-            </a:pPr>
-            <a:r>
-              <a:rPr sz="1500">
-                <a:solidFill>
-                  <a:srgbClr val="22282E"/>
-                </a:solidFill>
-              </a:rPr>
-              <a:t>•  Escribe valores: en tu dispositivo propio, escribe una característica de control y observa el efecto (encender/apagar, cambiar color).</a:t>
-            </a:r>
-          </a:p>
-          <a:p>
-            <a:pPr>
-              <a:spcAft>
-                <a:spcPts val="600"/>
-              </a:spcAft>
-            </a:pPr>
-            <a:r>
-              <a:rPr sz="1500">
-                <a:solidFill>
-                  <a:srgbClr val="22282E"/>
-                </a:solidFill>
-              </a:rPr>
-              <a:t>•  Habilita notificaciones: suscríbete a una característica notify y captura los eventos.</a:t>
-            </a:r>
-          </a:p>
-          <a:p>
-            <a:pPr>
-              <a:spcAft>
-                <a:spcPts val="600"/>
-              </a:spcAft>
-            </a:pPr>
-            <a:r>
-              <a:rPr sz="1500">
-                <a:solidFill>
-                  <a:srgbClr val="22282E"/>
-                </a:solidFill>
-              </a:rPr>
-              <a:t>•  Sniff: con el nRF52840/Ubertooth captura una conexión y ábrela en Wireshark; comprueba si el enlace está cifrado.</a:t>
-            </a:r>
-          </a:p>
-          <a:p>
-            <a:pPr>
-              <a:spcAft>
-                <a:spcPts val="600"/>
-              </a:spcAft>
-            </a:pPr>
-            <a:r>
-              <a:rPr sz="1500">
-                <a:solidFill>
-                  <a:srgbClr val="22282E"/>
-                </a:solidFill>
-              </a:rPr>
-              <a:t>•  Replay: si el dispositivo acepta comandos sin autenticación, reproduce una escritura capturada para demostrar el impacto.</a:t>
+              <a:t>•  Objetivo. Verificar que una característica sensible de un periférico de práctica solo acepta escritura tras el estado de seguridad y autorización definidos.</a:t>
+            </a:r>
+          </a:p>
+          <a:p>
+            <a:pPr>
+              <a:spcAft>
+                <a:spcPts val="600"/>
+              </a:spcAft>
+            </a:pPr>
+            <a:r>
+              <a:rPr sz="1500">
+                <a:solidFill>
+                  <a:srgbClr val="22282E"/>
+                </a:solidFill>
+              </a:rPr>
+              <a:t>•  Prerrequisitos. Clases 025 y 266; periférico/firmware propios; datos sintéticos; snapshot/configuración de restauración.</a:t>
+            </a:r>
+          </a:p>
+          <a:p>
+            <a:pPr>
+              <a:spcAft>
+                <a:spcPts val="600"/>
+              </a:spcAft>
+            </a:pPr>
+            <a:r>
+              <a:rPr sz="1500">
+                <a:solidFill>
+                  <a:srgbClr val="22282E"/>
+                </a:solidFill>
+              </a:rPr>
+              <a:t>•  Topología. Periférico educativo ↔ central Linux/teléfono; nRF Sniffer opcional entre ambos; backend local simulado sin Internet.</a:t>
+            </a:r>
+          </a:p>
+          <a:p>
+            <a:pPr>
+              <a:spcAft>
+                <a:spcPts val="600"/>
+              </a:spcAft>
+            </a:pPr>
+            <a:r>
+              <a:rPr sz="1500">
+                <a:solidFill>
+                  <a:srgbClr val="22282E"/>
+                </a:solidFill>
+              </a:rPr>
+              <a:t>•  Procedimiento.</a:t>
+            </a:r>
+          </a:p>
+          <a:p>
+            <a:pPr>
+              <a:spcAft>
+                <a:spcPts val="600"/>
+              </a:spcAft>
+            </a:pPr>
+            <a:r>
+              <a:rPr sz="1500">
+                <a:solidFill>
+                  <a:srgbClr val="22282E"/>
+                </a:solidFill>
+              </a:rPr>
+              <a:t>•  Registra firmware, UUIDs esperadas, método de pairing y matriz de acceso. Borra bonds previos en ambos extremos.</a:t>
+            </a:r>
+          </a:p>
+          <a:p>
+            <a:pPr>
+              <a:spcAft>
+                <a:spcPts val="600"/>
+              </a:spcAft>
+            </a:pPr>
+            <a:r>
+              <a:rPr sz="1500">
+                <a:solidFill>
+                  <a:srgbClr val="22282E"/>
+                </a:solidFill>
+              </a:rPr>
+              <a:t>•  Captura advertising durante 60 segundos. Anota dirección/tipo, intervalos aproximados, UUIDs y datos visibles. Decide si algo sensible sobra.</a:t>
+            </a:r>
+          </a:p>
+          <a:p>
+            <a:pPr>
+              <a:spcAft>
+                <a:spcPts val="600"/>
+              </a:spcAft>
+            </a:pPr>
+            <a:r>
+              <a:rPr sz="1500">
+                <a:solidFill>
+                  <a:srgbClr val="22282E"/>
+                </a:solidFill>
+              </a:rPr>
+              <a:t>•  Intenta descubrir y leer la característica pública sin pairing. Registra respuesta real.</a:t>
             </a:r>
           </a:p>
         </p:txBody>
@@ -3419,82 +3419,82 @@
                   <a:srgbClr val="22282E"/>
                 </a:solidFill>
               </a:rPr>
-              <a:t>•  Enumera todos los servicios y características de un dispositivo BLE propio.</a:t>
-            </a:r>
-          </a:p>
-          <a:p>
-            <a:pPr>
-              <a:spcAft>
-                <a:spcPts val="600"/>
-              </a:spcAft>
-            </a:pPr>
-            <a:r>
-              <a:rPr sz="1500">
-                <a:solidFill>
-                  <a:srgbClr val="22282E"/>
-                </a:solidFill>
-              </a:rPr>
-              <a:t>•  Identifica qué característica controla una función concreta.</a:t>
-            </a:r>
-          </a:p>
-          <a:p>
-            <a:pPr>
-              <a:spcAft>
-                <a:spcPts val="600"/>
-              </a:spcAft>
-            </a:pPr>
-            <a:r>
-              <a:rPr sz="1500">
-                <a:solidFill>
-                  <a:srgbClr val="22282E"/>
-                </a:solidFill>
-              </a:rPr>
-              <a:t>•  Cambia el estado del dispositivo escribiendo una característica.</a:t>
-            </a:r>
-          </a:p>
-          <a:p>
-            <a:pPr>
-              <a:spcAft>
-                <a:spcPts val="600"/>
-              </a:spcAft>
-            </a:pPr>
-            <a:r>
-              <a:rPr sz="1500">
-                <a:solidFill>
-                  <a:srgbClr val="22282E"/>
-                </a:solidFill>
-              </a:rPr>
-              <a:t>•  Captura tráfico BLE y determina si el emparejamiento usa Just Works.</a:t>
-            </a:r>
-          </a:p>
-          <a:p>
-            <a:pPr>
-              <a:spcAft>
-                <a:spcPts val="600"/>
-              </a:spcAft>
-            </a:pPr>
-            <a:r>
-              <a:rPr sz="1500">
-                <a:solidFill>
-                  <a:srgbClr val="22282E"/>
-                </a:solidFill>
-              </a:rPr>
-              <a:t>•  Suscríbete a notificaciones y registra tres eventos.</a:t>
-            </a:r>
-          </a:p>
-          <a:p>
-            <a:pPr>
-              <a:spcAft>
-                <a:spcPts val="600"/>
-              </a:spcAft>
-            </a:pPr>
-            <a:r>
-              <a:rPr sz="1500">
-                <a:solidFill>
-                  <a:srgbClr val="22282E"/>
-                </a:solidFill>
-              </a:rPr>
-              <a:t>•  Enumera las debilidades del dispositivo (falta de cifrado/autorización).</a:t>
+              <a:t>•  Explica por qué un enlace cifrado puede seguir permitiendo una acción no autorizada.</a:t>
+            </a:r>
+          </a:p>
+          <a:p>
+            <a:pPr>
+              <a:spcAft>
+                <a:spcPts val="600"/>
+              </a:spcAft>
+            </a:pPr>
+            <a:r>
+              <a:rPr sz="1500">
+                <a:solidFill>
+                  <a:srgbClr val="22282E"/>
+                </a:solidFill>
+              </a:rPr>
+              <a:t>•  Compara captura HCI, nRF Sniffer y PTI de una placa.</a:t>
+            </a:r>
+          </a:p>
+          <a:p>
+            <a:pPr>
+              <a:spcAft>
+                <a:spcPts val="600"/>
+              </a:spcAft>
+            </a:pPr>
+            <a:r>
+              <a:rPr sz="1500">
+                <a:solidFill>
+                  <a:srgbClr val="22282E"/>
+                </a:solidFill>
+              </a:rPr>
+              <a:t>•  Diseña una matriz de acceso GATT para estado sin pairing, bond nuevo, bond revocado y rol inválido.</a:t>
+            </a:r>
+          </a:p>
+          <a:p>
+            <a:pPr>
+              <a:spcAft>
+                <a:spcPts val="600"/>
+              </a:spcAft>
+            </a:pPr>
+            <a:r>
+              <a:rPr sz="1500">
+                <a:solidFill>
+                  <a:srgbClr val="22282E"/>
+                </a:solidFill>
+              </a:rPr>
+              <a:t>•  Identifica falsos positivos de una alerta por direcciones BLE cambiantes.</a:t>
+            </a:r>
+          </a:p>
+          <a:p>
+            <a:pPr>
+              <a:spcAft>
+                <a:spcPts val="600"/>
+              </a:spcAft>
+            </a:pPr>
+            <a:r>
+              <a:rPr sz="1500">
+                <a:solidFill>
+                  <a:srgbClr val="22282E"/>
+                </a:solidFill>
+              </a:rPr>
+              <a:t>•  Explica qué añade Thread sobre IEEE 802.15.4 y por qué no equivale a Zigbee.</a:t>
+            </a:r>
+          </a:p>
+          <a:p>
+            <a:pPr>
+              <a:spcAft>
+                <a:spcPts val="600"/>
+              </a:spcAft>
+            </a:pPr>
+            <a:r>
+              <a:rPr sz="1500">
+                <a:solidFill>
+                  <a:srgbClr val="22282E"/>
+                </a:solidFill>
+              </a:rPr>
+              <a:t>•  Diseña restauración que elimine bonds en los dos extremos y preserve evidencia separada.</a:t>
             </a:r>
           </a:p>
         </p:txBody>
@@ -3583,7 +3583,22 @@
                   <a:srgbClr val="22282E"/>
                 </a:solidFill>
               </a:rPr>
-              <a:t>•  Toma un dispositivo BLE propio (p. ej. una bombilla o candado de juguete) y demuestra control no autenticado: identifica la característica de control y modifícala para cambiar su estado sin usar la…</a:t>
+              <a:t>•  Entrega PCAPNG/HCI, inventario, matriz de estados, evidencia del rechazo y éxito legítimo, análisis de privacidad del advertising, revocación y restauración.</a:t>
+            </a:r>
+          </a:p>
+          <a:p>
+            <a:pPr>
+              <a:spcAft>
+                <a:spcPts val="600"/>
+              </a:spcAft>
+            </a:pPr>
+            <a:r>
+              <a:rPr sz="1500">
+                <a:solidFill>
+                  <a:srgbClr val="22282E"/>
+                </a:solidFill>
+              </a:rPr>
+              <a:t>•  Criterio de aceptación: la posición de captura está declarada; los filtros usan campos reales de Wireshark; no se confunde descubrimiento con autorización; el caso revocado queda bloqueado después de…</a:t>
             </a:r>
           </a:p>
         </p:txBody>
@@ -3672,67 +3687,97 @@
                   <a:srgbClr val="22282E"/>
                 </a:solidFill>
               </a:rPr>
-              <a:t>•  No aparece en el escaneo — No está en modo advertising; despiértalo o acércalo</a:t>
-            </a:r>
-          </a:p>
-          <a:p>
-            <a:pPr>
-              <a:spcAft>
-                <a:spcPts val="600"/>
-              </a:spcAft>
-            </a:pPr>
-            <a:r>
-              <a:rPr sz="1500">
-                <a:solidFill>
-                  <a:srgbClr val="22282E"/>
-                </a:solidFill>
-              </a:rPr>
-              <a:t>•  gatttool no conecta — La app oficial lo tiene conectado; ciérrala y reintenta</a:t>
-            </a:r>
-          </a:p>
-          <a:p>
-            <a:pPr>
-              <a:spcAft>
-                <a:spcPts val="600"/>
-              </a:spcAft>
-            </a:pPr>
-            <a:r>
-              <a:rPr sz="1500">
-                <a:solidFill>
-                  <a:srgbClr val="22282E"/>
-                </a:solidFill>
-              </a:rPr>
-              <a:t>•  Escritura sin efecto — Handle equivocado o requiere formato/valor concreto; revisa propiedades</a:t>
-            </a:r>
-          </a:p>
-          <a:p>
-            <a:pPr>
-              <a:spcAft>
-                <a:spcPts val="600"/>
-              </a:spcAft>
-            </a:pPr>
-            <a:r>
-              <a:rPr sz="1500">
-                <a:solidFill>
-                  <a:srgbClr val="22282E"/>
-                </a:solidFill>
-              </a:rPr>
-              <a:t>•  Sniffer no captura la conexión — Perdió el evento de conexión; reinicia el sniffer antes de conectar</a:t>
-            </a:r>
-          </a:p>
-          <a:p>
-            <a:pPr>
-              <a:spcAft>
-                <a:spcPts val="600"/>
-              </a:spcAft>
-            </a:pPr>
-            <a:r>
-              <a:rPr sz="1500">
-                <a:solidFill>
-                  <a:srgbClr val="22282E"/>
-                </a:solidFill>
-              </a:rPr>
-              <a:t>•  Tráfico ilegible en Wireshark — Enlace cifrado; necesitas la LTK o capturar el emparejamiento</a:t>
+              <a:t>•  Error — Por qué falla</a:t>
+            </a:r>
+          </a:p>
+          <a:p>
+            <a:pPr>
+              <a:spcAft>
+                <a:spcPts val="600"/>
+              </a:spcAft>
+            </a:pPr>
+            <a:r>
+              <a:rPr sz="1500">
+                <a:solidFill>
+                  <a:srgbClr val="22282E"/>
+                </a:solidFill>
+              </a:rPr>
+              <a:t>•  «Descubrí el servicio, tengo acceso» — GATT discovery no concede permisos</a:t>
+            </a:r>
+          </a:p>
+          <a:p>
+            <a:pPr>
+              <a:spcAft>
+                <a:spcPts val="600"/>
+              </a:spcAft>
+            </a:pPr>
+            <a:r>
+              <a:rPr sz="1500">
+                <a:solidFill>
+                  <a:srgbClr val="22282E"/>
+                </a:solidFill>
+              </a:rPr>
+              <a:t>•  «No está en PCAP, no ocurrió» — el sniffer puede perder conexión/saltos</a:t>
+            </a:r>
+          </a:p>
+          <a:p>
+            <a:pPr>
+              <a:spcAft>
+                <a:spcPts val="600"/>
+              </a:spcAft>
+            </a:pPr>
+            <a:r>
+              <a:rPr sz="1500">
+                <a:solidFill>
+                  <a:srgbClr val="22282E"/>
+                </a:solidFill>
+              </a:rPr>
+              <a:t>•  Usar RSSI como metros — depende de entorno/antena/potencia</a:t>
+            </a:r>
+          </a:p>
+          <a:p>
+            <a:pPr>
+              <a:spcAft>
+                <a:spcPts val="600"/>
+              </a:spcAft>
+            </a:pPr>
+            <a:r>
+              <a:rPr sz="1500">
+                <a:solidFill>
+                  <a:srgbClr val="22282E"/>
+                </a:solidFill>
+              </a:rPr>
+              <a:t>•  Compartir PCAP con claves — expone sesiones y privacidad</a:t>
+            </a:r>
+          </a:p>
+          <a:p>
+            <a:pPr>
+              <a:spcAft>
+                <a:spcPts val="600"/>
+              </a:spcAft>
+            </a:pPr>
+            <a:r>
+              <a:rPr sz="1500">
+                <a:solidFill>
+                  <a:srgbClr val="22282E"/>
+                </a:solidFill>
+              </a:rPr>
+              <a:t>•  Tratar BLE, Zigbee y Thread como variantes — comparten banda/radio, no pila completa</a:t>
+            </a:r>
+          </a:p>
+          <a:p>
+            <a:pPr>
+              <a:spcAft>
+                <a:spcPts val="600"/>
+              </a:spcAft>
+            </a:pPr>
+            <a:r>
+              <a:rPr sz="1500">
+                <a:solidFill>
+                  <a:srgbClr val="22282E"/>
+                </a:solidFill>
+              </a:rPr>
+              <a:t>•  Borrar bond en un solo extremo — deja estados inconsistentes</a:t>
             </a:r>
           </a:p>
         </p:txBody>
@@ -3821,82 +3866,52 @@
                   <a:srgbClr val="22282E"/>
                 </a:solidFill>
               </a:rPr>
-              <a:t>•  ❓ ¿Puedo interceptar cualquier tráfico BLE?</a:t>
-            </a:r>
-          </a:p>
-          <a:p>
-            <a:pPr>
-              <a:spcAft>
-                <a:spcPts val="600"/>
-              </a:spcAft>
-            </a:pPr>
-            <a:r>
-              <a:rPr sz="1500">
-                <a:solidFill>
-                  <a:srgbClr val="22282E"/>
-                </a:solidFill>
-              </a:rPr>
-              <a:t>•  Solo si capturas el emparejamiento o el enlace no está cifrado. Con Just Works y sin cifrado adicional, el tráfico suele ser legible; con emparejamiento seguro necesitas la clave.</a:t>
-            </a:r>
-          </a:p>
-          <a:p>
-            <a:pPr>
-              <a:spcAft>
-                <a:spcPts val="600"/>
-              </a:spcAft>
-            </a:pPr>
-            <a:r>
-              <a:rPr sz="1500">
-                <a:solidFill>
-                  <a:srgbClr val="22282E"/>
-                </a:solidFill>
-              </a:rPr>
-              <a:t>•  ❓ ¿Por qué tantos dispositivos BLE son inseguros?</a:t>
-            </a:r>
-          </a:p>
-          <a:p>
-            <a:pPr>
-              <a:spcAft>
-                <a:spcPts val="600"/>
-              </a:spcAft>
-            </a:pPr>
-            <a:r>
-              <a:rPr sz="1500">
-                <a:solidFill>
-                  <a:srgbClr val="22282E"/>
-                </a:solidFill>
-              </a:rPr>
-              <a:t>•  Algunos productos usan Just Works y confían demasiado en que solo la app oficial actuará como cliente. Si una característica sensible carece además de permisos de enlace y autorización de aplicación…</a:t>
-            </a:r>
-          </a:p>
-          <a:p>
-            <a:pPr>
-              <a:spcAft>
-                <a:spcPts val="600"/>
-              </a:spcAft>
-            </a:pPr>
-            <a:r>
-              <a:rPr sz="1500">
-                <a:solidFill>
-                  <a:srgbClr val="22282E"/>
-                </a:solidFill>
-              </a:rPr>
-              <a:t>•  ❓ ¿Sirve un dongle barato para empezar?</a:t>
-            </a:r>
-          </a:p>
-          <a:p>
-            <a:pPr>
-              <a:spcAft>
-                <a:spcPts val="600"/>
-              </a:spcAft>
-            </a:pPr>
-            <a:r>
-              <a:rPr sz="1500">
-                <a:solidFill>
-                  <a:srgbClr val="22282E"/>
-                </a:solidFill>
-              </a:rPr>
-              <a:t>•  Para escanear e interactuar sí. Para sniffear conexiones necesitas hardware específico como el nRF52840 o Ubertooth One.</a:t>
+              <a:t>•  ¿Un sniffer puede leer toda conexión BLE cifrada? No. Debe captar la sesión y disponer del material/contexto compatible; aun así puede perder paquetes.</a:t>
+            </a:r>
+          </a:p>
+          <a:p>
+            <a:pPr>
+              <a:spcAft>
+                <a:spcPts val="600"/>
+              </a:spcAft>
+            </a:pPr>
+            <a:r>
+              <a:rPr sz="1500">
+                <a:solidFill>
+                  <a:srgbClr val="22282E"/>
+                </a:solidFill>
+              </a:rPr>
+              <a:t>•  ¿Flipper Zero es un sniffer BLE completo? No debe asumirse. Las capacidades dependen de la aplicación y firmware; para captura aérea reproducible se usa una herramienta documentada para seguir…</a:t>
+            </a:r>
+          </a:p>
+          <a:p>
+            <a:pPr>
+              <a:spcAft>
+                <a:spcPts val="600"/>
+              </a:spcAft>
+            </a:pPr>
+            <a:r>
+              <a:rPr sz="1500">
+                <a:solidFill>
+                  <a:srgbClr val="22282E"/>
+                </a:solidFill>
+              </a:rPr>
+              <a:t>•  ¿Thread reemplaza WiFi? No. Es una red IPv6 de baja potencia sobre 802.15.4 que se integra mediante border routers y sirve a otros perfiles de uso.</a:t>
+            </a:r>
+          </a:p>
+          <a:p>
+            <a:pPr>
+              <a:spcAft>
+                <a:spcPts val="600"/>
+              </a:spcAft>
+            </a:pPr>
+            <a:r>
+              <a:rPr sz="1500">
+                <a:solidFill>
+                  <a:srgbClr val="22282E"/>
+                </a:solidFill>
+              </a:rPr>
+              <a:t>•  ¿Cerrar commissioning basta? Reduce altas no autorizadas, pero deben mantenerse autorización, actualización firmada, revocación y monitoreo.</a:t>
             </a:r>
           </a:p>
         </p:txBody>
@@ -3947,7 +3962,7 @@
                   <a:srgbClr val="0B3D2E"/>
                 </a:solidFill>
               </a:rPr>
-              <a:t>🔗 Referencias</a:t>
+              <a:t>🔗 Referencias verificables y alcance</a:t>
             </a:r>
           </a:p>
         </p:txBody>
@@ -3985,52 +4000,97 @@
                   <a:srgbClr val="22282E"/>
                 </a:solidFill>
               </a:rPr>
-              <a:t>•  Bluetooth SIG — especificación Core y GATT: &lt;https://www.bluetooth.com/specifications/&gt;</a:t>
-            </a:r>
-          </a:p>
-          <a:p>
-            <a:pPr>
-              <a:spcAft>
-                <a:spcPts val="600"/>
-              </a:spcAft>
-            </a:pPr>
-            <a:r>
-              <a:rPr sz="1500">
-                <a:solidFill>
-                  <a:srgbClr val="22282E"/>
-                </a:solidFill>
-              </a:rPr>
-              <a:t>•  Nordic nRF Connect: &lt;https://www.nordicsemi.com/Products/Development-tools/nrf-connect-for-desktop&gt;</a:t>
-            </a:r>
-          </a:p>
-          <a:p>
-            <a:pPr>
-              <a:spcAft>
-                <a:spcPts val="600"/>
-              </a:spcAft>
-            </a:pPr>
-            <a:r>
-              <a:rPr sz="1500">
-                <a:solidFill>
-                  <a:srgbClr val="22282E"/>
-                </a:solidFill>
-              </a:rPr>
-              <a:t>•  bettercap BLE: &lt;https://www.bettercap.org/modules/ble/&gt;</a:t>
-            </a:r>
-          </a:p>
-          <a:p>
-            <a:pPr>
-              <a:spcAft>
-                <a:spcPts val="600"/>
-              </a:spcAft>
-            </a:pPr>
-            <a:r>
-              <a:rPr sz="1500">
-                <a:solidFill>
-                  <a:srgbClr val="22282E"/>
-                </a:solidFill>
-              </a:rPr>
-              <a:t>•  Practical IoT Hacking, caps. de BLE — Chantzis et al.</a:t>
+              <a:t>•  Bluetooth SIG, Core Specification — arquitectura, enlace, seguridad y GATT/ATT.</a:t>
+            </a:r>
+          </a:p>
+          <a:p>
+            <a:pPr>
+              <a:spcAft>
+                <a:spcPts val="600"/>
+              </a:spcAft>
+            </a:pPr>
+            <a:r>
+              <a:rPr sz="1500">
+                <a:solidFill>
+                  <a:srgbClr val="22282E"/>
+                </a:solidFill>
+              </a:rPr>
+              <a:t>•  Nordic Semiconductor, nRF Sniffer for Bluetooth LE — hardware compatible, Wireshark, claves y límites de captura.</a:t>
+            </a:r>
+          </a:p>
+          <a:p>
+            <a:pPr>
+              <a:spcAft>
+                <a:spcPts val="600"/>
+              </a:spcAft>
+            </a:pPr>
+            <a:r>
+              <a:rPr sz="1500">
+                <a:solidFill>
+                  <a:srgbClr val="22282E"/>
+                </a:solidFill>
+              </a:rPr>
+              <a:t>•  Wireshark, campos reales btle y captura Bluetooth — esquemas y posiciones de captura.</a:t>
+            </a:r>
+          </a:p>
+          <a:p>
+            <a:pPr>
+              <a:spcAft>
+                <a:spcPts val="600"/>
+              </a:spcAft>
+            </a:pPr>
+            <a:r>
+              <a:rPr sz="1500">
+                <a:solidFill>
+                  <a:srgbClr val="22282E"/>
+                </a:solidFill>
+              </a:rPr>
+              <a:t>•  BlueZ, bluetoothctl y btmon — administración/captura HCI en Linux; opciones dependen de versión.</a:t>
+            </a:r>
+          </a:p>
+          <a:p>
+            <a:pPr>
+              <a:spcAft>
+                <a:spcPts val="600"/>
+              </a:spcAft>
+            </a:pPr>
+            <a:r>
+              <a:rPr sz="1500">
+                <a:solidFill>
+                  <a:srgbClr val="22282E"/>
+                </a:solidFill>
+              </a:rPr>
+              <a:t>•  Thread Group, Overview — IPv6 sobre IEEE 802.15.4, seguridad y bajo consumo.</a:t>
+            </a:r>
+          </a:p>
+          <a:p>
+            <a:pPr>
+              <a:spcAft>
+                <a:spcPts val="600"/>
+              </a:spcAft>
+            </a:pPr>
+            <a:r>
+              <a:rPr sz="1500">
+                <a:solidFill>
+                  <a:srgbClr val="22282E"/>
+                </a:solidFill>
+              </a:rPr>
+              <a:t>•  Silicon Labs, Network Analyzer — PTI, timestamps, RSSI/LQI, CRC y trazas por nodo para Zigbee/Thread.</a:t>
+            </a:r>
+          </a:p>
+          <a:p>
+            <a:pPr>
+              <a:spcAft>
+                <a:spcPts val="600"/>
+              </a:spcAft>
+            </a:pPr>
+            <a:r>
+              <a:rPr sz="1500">
+                <a:solidFill>
+                  <a:srgbClr val="22282E"/>
+                </a:solidFill>
+              </a:rPr>
+              <a:t>•  NIST, IR 8259A — identificación, configuración, protección de datos, actualización y estado de ciberseguridad de IoT.</a:t>
             </a:r>
           </a:p>
         </p:txBody>
@@ -4088,7 +4148,7 @@
       </p:sp>
       <p:pic>
         <p:nvPicPr>
-          <p:cNvPr id="3" name="Picture 2" descr="abaf9762b6ded7d6.png"/>
+          <p:cNvPr id="3" name="Picture 2" descr="d3ce4a7cd1554d65.png"/>
           <p:cNvPicPr>
             <a:picLocks noChangeAspect="1"/>
           </p:cNvPicPr>
@@ -4102,8 +4162,8 @@
         </p:blipFill>
         <p:spPr>
           <a:xfrm>
-            <a:off x="457200" y="2953512"/>
-            <a:ext cx="8229600" cy="1591056"/>
+            <a:off x="664672" y="1097280"/>
+            <a:ext cx="7814656" cy="5303520"/>
           </a:xfrm>
           <a:prstGeom prst="rect">
             <a:avLst/>
@@ -4194,7 +4254,7 @@
                   <a:srgbClr val="22282E"/>
                 </a:solidFill>
               </a:rPr>
-              <a:t>•  Auditar dispositivos Bluetooth Low Energy (BLE), el protocolo inalámbrico dominante en wearables, cerraduras, sensores y gadgets IoT. El alumno entenderá la pila BLE (GAP/GATT), los modos de…</a:t>
+              <a:t>•  Auditar un periférico Bluetooth Low Energy propio desde el anuncio hasta la autorización de aplicación, usando un teléfono, BlueZ o una placa de desarrollo como instrumentos controlados. La clase…</a:t>
             </a:r>
           </a:p>
         </p:txBody>
@@ -4298,82 +4358,82 @@
                   <a:srgbClr val="22282E"/>
                 </a:solidFill>
               </a:rPr>
-              <a:t>•  Describir la pila BLE: roles GAP, servicios y características GATT, y advertising.</a:t>
-            </a:r>
-          </a:p>
-          <a:p>
-            <a:pPr>
-              <a:spcAft>
-                <a:spcPts val="600"/>
-              </a:spcAft>
-            </a:pPr>
-            <a:r>
-              <a:rPr sz="1500">
-                <a:solidFill>
-                  <a:srgbClr val="22282E"/>
-                </a:solidFill>
-              </a:rPr>
-              <a:t>•  Escanear y enumerar dispositivos y sus servicios/características.</a:t>
-            </a:r>
-          </a:p>
-          <a:p>
-            <a:pPr>
-              <a:spcAft>
-                <a:spcPts val="600"/>
-              </a:spcAft>
-            </a:pPr>
-            <a:r>
-              <a:rPr sz="1500">
-                <a:solidFill>
-                  <a:srgbClr val="22282E"/>
-                </a:solidFill>
-              </a:rPr>
-              <a:t>•  Explicar los modos de emparejamiento (Just Works, Passkey, OOB) y sus riesgos.</a:t>
-            </a:r>
-          </a:p>
-          <a:p>
-            <a:pPr>
-              <a:spcAft>
-                <a:spcPts val="600"/>
-              </a:spcAft>
-            </a:pPr>
-            <a:r>
-              <a:rPr sz="1500">
-                <a:solidFill>
-                  <a:srgbClr val="22282E"/>
-                </a:solidFill>
-              </a:rPr>
-              <a:t>•  Leer y escribir características de un dispositivo propio con gatttool/nRF Connect.</a:t>
-            </a:r>
-          </a:p>
-          <a:p>
-            <a:pPr>
-              <a:spcAft>
-                <a:spcPts val="600"/>
-              </a:spcAft>
-            </a:pPr>
-            <a:r>
-              <a:rPr sz="1500">
-                <a:solidFill>
-                  <a:srgbClr val="22282E"/>
-                </a:solidFill>
-              </a:rPr>
-              <a:t>•  Capturar tráfico BLE con un sniffer y analizarlo en Wireshark.</a:t>
-            </a:r>
-          </a:p>
-          <a:p>
-            <a:pPr>
-              <a:spcAft>
-                <a:spcPts val="600"/>
-              </a:spcAft>
-            </a:pPr>
-            <a:r>
-              <a:rPr sz="1500">
-                <a:solidFill>
-                  <a:srgbClr val="22282E"/>
-                </a:solidFill>
-              </a:rPr>
-              <a:t>•  Identificar controles ausentes (falta de cifrado, autorización en el cliente).</a:t>
+              <a:t>•  Distinguir Bluetooth Classic y BLE por arquitectura, no solo por nombre comercial.</a:t>
+            </a:r>
+          </a:p>
+          <a:p>
+            <a:pPr>
+              <a:spcAft>
+                <a:spcPts val="600"/>
+              </a:spcAft>
+            </a:pPr>
+            <a:r>
+              <a:rPr sz="1500">
+                <a:solidFill>
+                  <a:srgbClr val="22282E"/>
+                </a:solidFill>
+              </a:rPr>
+              <a:t>•  Explicar advertising, conexión, pairing, bonding, seguridad de enlace, GATT y autorización de aplicación.</a:t>
+            </a:r>
+          </a:p>
+          <a:p>
+            <a:pPr>
+              <a:spcAft>
+                <a:spcPts val="600"/>
+              </a:spcAft>
+            </a:pPr>
+            <a:r>
+              <a:rPr sz="1500">
+                <a:solidFill>
+                  <a:srgbClr val="22282E"/>
+                </a:solidFill>
+              </a:rPr>
+              <a:t>•  Reconocer y configurar un adaptador, placa de desarrollo o sniffer compatible, registrando firmware y limitaciones.</a:t>
+            </a:r>
+          </a:p>
+          <a:p>
+            <a:pPr>
+              <a:spcAft>
+                <a:spcPts val="600"/>
+              </a:spcAft>
+            </a:pPr>
+            <a:r>
+              <a:rPr sz="1500">
+                <a:solidFill>
+                  <a:srgbClr val="22282E"/>
+                </a:solidFill>
+              </a:rPr>
+              <a:t>•  Capturar anuncios y una sesión de un periférico propio con herramientas oficiales.</a:t>
+            </a:r>
+          </a:p>
+          <a:p>
+            <a:pPr>
+              <a:spcAft>
+                <a:spcPts val="600"/>
+              </a:spcAft>
+            </a:pPr>
+            <a:r>
+              <a:rPr sz="1500">
+                <a:solidFill>
+                  <a:srgbClr val="22282E"/>
+                </a:solidFill>
+              </a:rPr>
+              <a:t>•  Interpretar direcciones públicas/aleatorias, RSSI, servicios, permisos y datos cifrados sin atribución excesiva.</a:t>
+            </a:r>
+          </a:p>
+          <a:p>
+            <a:pPr>
+              <a:spcAft>
+                <a:spcPts val="600"/>
+              </a:spcAft>
+            </a:pPr>
+            <a:r>
+              <a:rPr sz="1500">
+                <a:solidFill>
+                  <a:srgbClr val="22282E"/>
+                </a:solidFill>
+              </a:rPr>
+              <a:t>•  Validar que una característica sensible rechaza accesos no autenticados/no autorizados.</a:t>
             </a:r>
           </a:p>
         </p:txBody>
@@ -4462,97 +4522,97 @@
                   <a:srgbClr val="22282E"/>
                 </a:solidFill>
               </a:rPr>
-              <a:t>•  1 — Pila BLE y roles GAP</a:t>
-            </a:r>
-          </a:p>
-          <a:p>
-            <a:pPr>
-              <a:spcAft>
-                <a:spcPts val="600"/>
-              </a:spcAft>
-            </a:pPr>
-            <a:r>
-              <a:rPr sz="1500">
-                <a:solidFill>
-                  <a:srgbClr val="22282E"/>
-                </a:solidFill>
-              </a:rPr>
-              <a:t>•  2 — GATT: servicios y características</a:t>
-            </a:r>
-          </a:p>
-          <a:p>
-            <a:pPr>
-              <a:spcAft>
-                <a:spcPts val="600"/>
-              </a:spcAft>
-            </a:pPr>
-            <a:r>
-              <a:rPr sz="1500">
-                <a:solidFill>
-                  <a:srgbClr val="22282E"/>
-                </a:solidFill>
-              </a:rPr>
-              <a:t>•  3 — Advertising y descubrimiento</a:t>
-            </a:r>
-          </a:p>
-          <a:p>
-            <a:pPr>
-              <a:spcAft>
-                <a:spcPts val="600"/>
-              </a:spcAft>
-            </a:pPr>
-            <a:r>
-              <a:rPr sz="1500">
-                <a:solidFill>
-                  <a:srgbClr val="22282E"/>
-                </a:solidFill>
-              </a:rPr>
-              <a:t>•  4 — Emparejamiento y cifrado</a:t>
-            </a:r>
-          </a:p>
-          <a:p>
-            <a:pPr>
-              <a:spcAft>
-                <a:spcPts val="600"/>
-              </a:spcAft>
-            </a:pPr>
-            <a:r>
-              <a:rPr sz="1500">
-                <a:solidFill>
-                  <a:srgbClr val="22282E"/>
-                </a:solidFill>
-              </a:rPr>
-              <a:t>•  5 — Enumeración con gatttool/nRF</a:t>
-            </a:r>
-          </a:p>
-          <a:p>
-            <a:pPr>
-              <a:spcAft>
-                <a:spcPts val="600"/>
-              </a:spcAft>
-            </a:pPr>
-            <a:r>
-              <a:rPr sz="1500">
-                <a:solidFill>
-                  <a:srgbClr val="22282E"/>
-                </a:solidFill>
-              </a:rPr>
-              <a:t>•  6 — Sniffing con nRF/Ubertooth</a:t>
-            </a:r>
-          </a:p>
-          <a:p>
-            <a:pPr>
-              <a:spcAft>
-                <a:spcPts val="600"/>
-              </a:spcAft>
-            </a:pPr>
-            <a:r>
-              <a:rPr sz="1500">
-                <a:solidFill>
-                  <a:srgbClr val="22282E"/>
-                </a:solidFill>
-              </a:rPr>
-              <a:t>•  7 — Replay y manipulación</a:t>
+              <a:t>•  1 — Classic vs BLE</a:t>
+            </a:r>
+          </a:p>
+          <a:p>
+            <a:pPr>
+              <a:spcAft>
+                <a:spcPts val="600"/>
+              </a:spcAft>
+            </a:pPr>
+            <a:r>
+              <a:rPr sz="1500">
+                <a:solidFill>
+                  <a:srgbClr val="22282E"/>
+                </a:solidFill>
+              </a:rPr>
+              <a:t>•  2 — Advertising y privacidad</a:t>
+            </a:r>
+          </a:p>
+          <a:p>
+            <a:pPr>
+              <a:spcAft>
+                <a:spcPts val="600"/>
+              </a:spcAft>
+            </a:pPr>
+            <a:r>
+              <a:rPr sz="1500">
+                <a:solidFill>
+                  <a:srgbClr val="22282E"/>
+                </a:solidFill>
+              </a:rPr>
+              <a:t>•  3 — Pairing, bonding y cifrado</a:t>
+            </a:r>
+          </a:p>
+          <a:p>
+            <a:pPr>
+              <a:spcAft>
+                <a:spcPts val="600"/>
+              </a:spcAft>
+            </a:pPr>
+            <a:r>
+              <a:rPr sz="1500">
+                <a:solidFill>
+                  <a:srgbClr val="22282E"/>
+                </a:solidFill>
+              </a:rPr>
+              <a:t>•  4 — GATT y autorización</a:t>
+            </a:r>
+          </a:p>
+          <a:p>
+            <a:pPr>
+              <a:spcAft>
+                <a:spcPts val="600"/>
+              </a:spcAft>
+            </a:pPr>
+            <a:r>
+              <a:rPr sz="1500">
+                <a:solidFill>
+                  <a:srgbClr val="22282E"/>
+                </a:solidFill>
+              </a:rPr>
+              <a:t>•  5 — Instrumentación</a:t>
+            </a:r>
+          </a:p>
+          <a:p>
+            <a:pPr>
+              <a:spcAft>
+                <a:spcPts val="600"/>
+              </a:spcAft>
+            </a:pPr>
+            <a:r>
+              <a:rPr sz="1500">
+                <a:solidFill>
+                  <a:srgbClr val="22282E"/>
+                </a:solidFill>
+              </a:rPr>
+              <a:t>•  6 — Telemetría y defensa</a:t>
+            </a:r>
+          </a:p>
+          <a:p>
+            <a:pPr>
+              <a:spcAft>
+                <a:spcPts val="600"/>
+              </a:spcAft>
+            </a:pPr>
+            <a:r>
+              <a:rPr sz="1500">
+                <a:solidFill>
+                  <a:srgbClr val="22282E"/>
+                </a:solidFill>
+              </a:rPr>
+              <a:t>•  7 — Zigbee y Thread</a:t>
             </a:r>
           </a:p>
         </p:txBody>
@@ -4641,52 +4701,97 @@
                   <a:srgbClr val="22282E"/>
                 </a:solidFill>
               </a:rPr>
-              <a:t>•  Bluetooth Classic y BLE comparten familia, pero difieren en perfiles y uso. En BLE, advertising anuncia presencia y datos; una conexión descubre servicios y características GATT; seguridad de enlace…</a:t>
-            </a:r>
-          </a:p>
-          <a:p>
-            <a:pPr>
-              <a:spcAft>
-                <a:spcPts val="600"/>
-              </a:spcAft>
-            </a:pPr>
-            <a:r>
-              <a:rPr sz="1500">
-                <a:solidFill>
-                  <a:srgbClr val="22282E"/>
-                </a:solidFill>
-              </a:rPr>
-              <a:t>•  «Just Works» puede ser apropiado cuando no existe interfaz, pero no autentica suficientemente frente a MITM en todos los escenarios. Numeric Comparison y passkey dependen de capacidades y…</a:t>
-            </a:r>
-          </a:p>
-          <a:p>
-            <a:pPr>
-              <a:spcAft>
-                <a:spcPts val="600"/>
-              </a:spcAft>
-            </a:pPr>
-            <a:r>
-              <a:rPr sz="1500">
-                <a:solidFill>
-                  <a:srgbClr val="22282E"/>
-                </a:solidFill>
-              </a:rPr>
-              <a:t>•  Las direcciones privadas reducen seguimiento, aunque payload, ritmo, nombre y comportamiento pueden seguir correlacionando. Capturar tráfico de una conexión propia exige registrar versión, método de…</a:t>
-            </a:r>
-          </a:p>
-          <a:p>
-            <a:pPr>
-              <a:spcAft>
-                <a:spcPts val="600"/>
-              </a:spcAft>
-            </a:pPr>
-            <a:r>
-              <a:rPr sz="1500">
-                <a:solidFill>
-                  <a:srgbClr val="22282E"/>
-                </a:solidFill>
-              </a:rPr>
-              <a:t>•  Una cerradura usa enlace BLE cifrado, pero acepta el mismo comando de apertura después de conectar cualquier teléfono emparejado. Falta autorización por usuario y frescura a nivel de aplicación. Se…</a:t>
+              <a:t>•  Bluetooth Classic y BLE comparten banda y una marca, pero tienen enlaces, perfiles y uso energético distintos. BLE organiza el descubrimiento mediante anuncios, establece conexiones sobre canales de…</a:t>
+            </a:r>
+          </a:p>
+          <a:p>
+            <a:pPr>
+              <a:spcAft>
+                <a:spcPts val="600"/>
+              </a:spcAft>
+            </a:pPr>
+            <a:r>
+              <a:rPr sz="1500">
+                <a:solidFill>
+                  <a:srgbClr val="22282E"/>
+                </a:solidFill>
+              </a:rPr>
+              <a:t>•  En BLE, el descubrimiento revela lo que el periférico decide anunciar: dirección, nombre opcional, UUIDs, fabricante y RSSI aproximado. La dirección puede ser pública, aleatoria estática o privada y…</a:t>
+            </a:r>
+          </a:p>
+          <a:p>
+            <a:pPr>
+              <a:spcAft>
+                <a:spcPts val="600"/>
+              </a:spcAft>
+            </a:pPr>
+            <a:r>
+              <a:rPr sz="1500">
+                <a:solidFill>
+                  <a:srgbClr val="22282E"/>
+                </a:solidFill>
+              </a:rPr>
+              <a:t>•  El diagrama separa dos controles que suelen mezclarse. El cifrado de enlace protege el transporte; la autorización decide si esa central puede ejecutar una operación. Un dispositivo puede tener…</a:t>
+            </a:r>
+          </a:p>
+          <a:p>
+            <a:pPr>
+              <a:spcAft>
+                <a:spcPts val="600"/>
+              </a:spcAft>
+            </a:pPr>
+            <a:r>
+              <a:rPr sz="1500">
+                <a:solidFill>
+                  <a:srgbClr val="22282E"/>
+                </a:solidFill>
+              </a:rPr>
+              <a:t>•  Pairing negocia claves y propiedades de seguridad. Bonding guarda material para reconectar más tarde. «Just Works», entrada de passkey, comparación numérica y OOB ofrecen distintas garantías frente a…</a:t>
+            </a:r>
+          </a:p>
+          <a:p>
+            <a:pPr>
+              <a:spcAft>
+                <a:spcPts val="600"/>
+              </a:spcAft>
+            </a:pPr>
+            <a:r>
+              <a:rPr sz="1500">
+                <a:solidFill>
+                  <a:srgbClr val="22282E"/>
+                </a:solidFill>
+              </a:rPr>
+              <a:t>•  La seguridad de enlace no corrige una aplicación que envía secretos en advertising, usa comandos sin autorización o acepta firmware no firmado. Tampoco evita que presencia y patrones temporales sean…</a:t>
+            </a:r>
+          </a:p>
+          <a:p>
+            <a:pPr>
+              <a:spcAft>
+                <a:spcPts val="600"/>
+              </a:spcAft>
+            </a:pPr>
+            <a:r>
+              <a:rPr sz="1500">
+                <a:solidFill>
+                  <a:srgbClr val="22282E"/>
+                </a:solidFill>
+              </a:rPr>
+              <a:t>•  Posición — Ejemplo</a:t>
+            </a:r>
+          </a:p>
+          <a:p>
+            <a:pPr>
+              <a:spcAft>
+                <a:spcPts val="600"/>
+              </a:spcAft>
+            </a:pPr>
+            <a:r>
+              <a:rPr sz="1500">
+                <a:solidFill>
+                  <a:srgbClr val="22282E"/>
+                </a:solidFill>
+              </a:rPr>
+              <a:t>•  Host/central — BlueZ btmon, HCI del teléfono/PC</a:t>
             </a:r>
           </a:p>
         </p:txBody>
@@ -4737,7 +4842,7 @@
                   <a:srgbClr val="0B3D2E"/>
                 </a:solidFill>
               </a:rPr>
-              <a:t>📔 Glosario operativo</a:t>
+              <a:t>📖 Definiciones y características</a:t>
             </a:r>
           </a:p>
         </p:txBody>
@@ -4775,82 +4880,97 @@
                   <a:srgbClr val="22282E"/>
                 </a:solidFill>
               </a:rPr>
-              <a:t>•  Término — Definición útil</a:t>
-            </a:r>
-          </a:p>
-          <a:p>
-            <a:pPr>
-              <a:spcAft>
-                <a:spcPts val="600"/>
-              </a:spcAft>
-            </a:pPr>
-            <a:r>
-              <a:rPr sz="1500">
-                <a:solidFill>
-                  <a:srgbClr val="22282E"/>
-                </a:solidFill>
-              </a:rPr>
-              <a:t>•  Advertising — Emisión BLE para descubrimiento y datos breves.</a:t>
-            </a:r>
-          </a:p>
-          <a:p>
-            <a:pPr>
-              <a:spcAft>
-                <a:spcPts val="600"/>
-              </a:spcAft>
-            </a:pPr>
-            <a:r>
-              <a:rPr sz="1500">
-                <a:solidFill>
-                  <a:srgbClr val="22282E"/>
-                </a:solidFill>
-              </a:rPr>
-              <a:t>•  GATT — Modelo de servicios, características y operaciones BLE.</a:t>
-            </a:r>
-          </a:p>
-          <a:p>
-            <a:pPr>
-              <a:spcAft>
-                <a:spcPts val="600"/>
-              </a:spcAft>
-            </a:pPr>
-            <a:r>
-              <a:rPr sz="1500">
-                <a:solidFill>
-                  <a:srgbClr val="22282E"/>
-                </a:solidFill>
-              </a:rPr>
-              <a:t>•  Pairing — Proceso que establece parámetros y claves de seguridad.</a:t>
-            </a:r>
-          </a:p>
-          <a:p>
-            <a:pPr>
-              <a:spcAft>
-                <a:spcPts val="600"/>
-              </a:spcAft>
-            </a:pPr>
-            <a:r>
-              <a:rPr sz="1500">
-                <a:solidFill>
-                  <a:srgbClr val="22282E"/>
-                </a:solidFill>
-              </a:rPr>
-              <a:t>•  Bonding — Conservación de claves para conexiones futuras.</a:t>
-            </a:r>
-          </a:p>
-          <a:p>
-            <a:pPr>
-              <a:spcAft>
-                <a:spcPts val="600"/>
-              </a:spcAft>
-            </a:pPr>
-            <a:r>
-              <a:rPr sz="1500">
-                <a:solidFill>
-                  <a:srgbClr val="22282E"/>
-                </a:solidFill>
-              </a:rPr>
-              <a:t>•  Dirección privada — Dirección que rota para reducir seguimiento, con límites.</a:t>
+              <a:t>•  Central/periférico: roles de conexión BLE; no equivalen necesariamente a cliente/servidor GATT.</a:t>
+            </a:r>
+          </a:p>
+          <a:p>
+            <a:pPr>
+              <a:spcAft>
+                <a:spcPts val="600"/>
+              </a:spcAft>
+            </a:pPr>
+            <a:r>
+              <a:rPr sz="1500">
+                <a:solidFill>
+                  <a:srgbClr val="22282E"/>
+                </a:solidFill>
+              </a:rPr>
+              <a:t>•  Advertising: tramas para descubrimiento y datos sin conexión.</a:t>
+            </a:r>
+          </a:p>
+          <a:p>
+            <a:pPr>
+              <a:spcAft>
+                <a:spcPts val="600"/>
+              </a:spcAft>
+            </a:pPr>
+            <a:r>
+              <a:rPr sz="1500">
+                <a:solidFill>
+                  <a:srgbClr val="22282E"/>
+                </a:solidFill>
+              </a:rPr>
+              <a:t>•  GATT: modelo de atributos organizado en servicios y características.</a:t>
+            </a:r>
+          </a:p>
+          <a:p>
+            <a:pPr>
+              <a:spcAft>
+                <a:spcPts val="600"/>
+              </a:spcAft>
+            </a:pPr>
+            <a:r>
+              <a:rPr sz="1500">
+                <a:solidFill>
+                  <a:srgbClr val="22282E"/>
+                </a:solidFill>
+              </a:rPr>
+              <a:t>•  ATT: protocolo de acceso a atributos que GATT utiliza.</a:t>
+            </a:r>
+          </a:p>
+          <a:p>
+            <a:pPr>
+              <a:spcAft>
+                <a:spcPts val="600"/>
+              </a:spcAft>
+            </a:pPr>
+            <a:r>
+              <a:rPr sz="1500">
+                <a:solidFill>
+                  <a:srgbClr val="22282E"/>
+                </a:solidFill>
+              </a:rPr>
+              <a:t>•  Pairing: establecimiento de seguridad/claves; bonding conserva claves.</a:t>
+            </a:r>
+          </a:p>
+          <a:p>
+            <a:pPr>
+              <a:spcAft>
+                <a:spcPts val="600"/>
+              </a:spcAft>
+            </a:pPr>
+            <a:r>
+              <a:rPr sz="1500">
+                <a:solidFill>
+                  <a:srgbClr val="22282E"/>
+                </a:solidFill>
+              </a:rPr>
+              <a:t>•  LTK/IRK: claves usadas para cifrado de enlace y resolución de identidad privada.</a:t>
+            </a:r>
+          </a:p>
+          <a:p>
+            <a:pPr>
+              <a:spcAft>
+                <a:spcPts val="600"/>
+              </a:spcAft>
+            </a:pPr>
+            <a:r>
+              <a:rPr sz="1500">
+                <a:solidFill>
+                  <a:srgbClr val="22282E"/>
+                </a:solidFill>
+              </a:rPr>
+              <a:t>•  HCI: interfaz entre host y controlador Bluetooth.</a:t>
             </a:r>
           </a:p>
         </p:txBody>
@@ -4901,7 +5021,7 @@
                   <a:srgbClr val="0B3D2E"/>
                 </a:solidFill>
               </a:rPr>
-              <a:t>✅ Criterio de dominio</a:t>
+              <a:t>📔 Glosario operativo</a:t>
             </a:r>
           </a:p>
         </p:txBody>
@@ -4939,7 +5059,97 @@
                   <a:srgbClr val="22282E"/>
                 </a:solidFill>
               </a:rPr>
-              <a:t>•  El alumno domina BLE cuando separa descubrimiento, enlace y autorización, identifica el método de pairing, prueba solo periféricos propios y propone protección contextual para una característica…</a:t>
+              <a:t>•  Término — Definición útil</a:t>
+            </a:r>
+          </a:p>
+          <a:p>
+            <a:pPr>
+              <a:spcAft>
+                <a:spcPts val="600"/>
+              </a:spcAft>
+            </a:pPr>
+            <a:r>
+              <a:rPr sz="1500">
+                <a:solidFill>
+                  <a:srgbClr val="22282E"/>
+                </a:solidFill>
+              </a:rPr>
+              <a:t>•  UUID — Identificador de servicio/característica; estándar o propietario.</a:t>
+            </a:r>
+          </a:p>
+          <a:p>
+            <a:pPr>
+              <a:spcAft>
+                <a:spcPts val="600"/>
+              </a:spcAft>
+            </a:pPr>
+            <a:r>
+              <a:rPr sz="1500">
+                <a:solidFill>
+                  <a:srgbClr val="22282E"/>
+                </a:solidFill>
+              </a:rPr>
+              <a:t>•  Notification — Actualización GATT sin confirmación ATT.</a:t>
+            </a:r>
+          </a:p>
+          <a:p>
+            <a:pPr>
+              <a:spcAft>
+                <a:spcPts val="600"/>
+              </a:spcAft>
+            </a:pPr>
+            <a:r>
+              <a:rPr sz="1500">
+                <a:solidFill>
+                  <a:srgbClr val="22282E"/>
+                </a:solidFill>
+              </a:rPr>
+              <a:t>•  Indication — Actualización GATT que requiere confirmación.</a:t>
+            </a:r>
+          </a:p>
+          <a:p>
+            <a:pPr>
+              <a:spcAft>
+                <a:spcPts val="600"/>
+              </a:spcAft>
+            </a:pPr>
+            <a:r>
+              <a:rPr sz="1500">
+                <a:solidFill>
+                  <a:srgbClr val="22282E"/>
+                </a:solidFill>
+              </a:rPr>
+              <a:t>•  RPA — Dirección privada resoluble que rota y puede resolverse con IRK.</a:t>
+            </a:r>
+          </a:p>
+          <a:p>
+            <a:pPr>
+              <a:spcAft>
+                <a:spcPts val="600"/>
+              </a:spcAft>
+            </a:pPr>
+            <a:r>
+              <a:rPr sz="1500">
+                <a:solidFill>
+                  <a:srgbClr val="22282E"/>
+                </a:solidFill>
+              </a:rPr>
+              <a:t>•  Access Address — Valor que identifica una conexión BLE en la capa de enlace.</a:t>
+            </a:r>
+          </a:p>
+          <a:p>
+            <a:pPr>
+              <a:spcAft>
+                <a:spcPts val="600"/>
+              </a:spcAft>
+            </a:pPr>
+            <a:r>
+              <a:rPr sz="1500">
+                <a:solidFill>
+                  <a:srgbClr val="22282E"/>
+                </a:solidFill>
+              </a:rPr>
+              <a:t>•  Connection interval — Periodicidad negociada de eventos de conexión.</a:t>
             </a:r>
           </a:p>
         </p:txBody>
@@ -4990,7 +5200,7 @@
                   <a:srgbClr val="0B3D2E"/>
                 </a:solidFill>
               </a:rPr>
-              <a:t>📖 Definiciones y características</a:t>
+              <a:t>✅ Criterio de dominio</a:t>
             </a:r>
           </a:p>
         </p:txBody>
@@ -5028,82 +5238,7 @@
                   <a:srgbClr val="22282E"/>
                 </a:solidFill>
               </a:rPr>
-              <a:t>•  GAP (Generic Access Profile): define roles (central/periférico) y el advertising. Característica: controla descubrimiento y conexión.</a:t>
-            </a:r>
-          </a:p>
-          <a:p>
-            <a:pPr>
-              <a:spcAft>
-                <a:spcPts val="600"/>
-              </a:spcAft>
-            </a:pPr>
-            <a:r>
-              <a:rPr sz="1500">
-                <a:solidFill>
-                  <a:srgbClr val="22282E"/>
-                </a:solidFill>
-              </a:rPr>
-              <a:t>•  GATT (Generic Attribute Profile): organiza datos en servicios y características con handles y UUID. Característica: es la superficie funcional del dispositivo.</a:t>
-            </a:r>
-          </a:p>
-          <a:p>
-            <a:pPr>
-              <a:spcAft>
-                <a:spcPts val="600"/>
-              </a:spcAft>
-            </a:pPr>
-            <a:r>
-              <a:rPr sz="1500">
-                <a:solidFill>
-                  <a:srgbClr val="22282E"/>
-                </a:solidFill>
-              </a:rPr>
-              <a:t>•  Característica (characteristic): valor con propiedades (read/write/notify). Característica: leerla/escribirla puede cambiar el estado del dispositivo.</a:t>
-            </a:r>
-          </a:p>
-          <a:p>
-            <a:pPr>
-              <a:spcAft>
-                <a:spcPts val="600"/>
-              </a:spcAft>
-            </a:pPr>
-            <a:r>
-              <a:rPr sz="1500">
-                <a:solidFill>
-                  <a:srgbClr val="22282E"/>
-                </a:solidFill>
-              </a:rPr>
-              <a:t>•  Just Works: emparejamiento sin autenticación de usuario. Característica: vulnerable a MITM; muy común en IoT barato.</a:t>
-            </a:r>
-          </a:p>
-          <a:p>
-            <a:pPr>
-              <a:spcAft>
-                <a:spcPts val="600"/>
-              </a:spcAft>
-            </a:pPr>
-            <a:r>
-              <a:rPr sz="1500">
-                <a:solidFill>
-                  <a:srgbClr val="22282E"/>
-                </a:solidFill>
-              </a:rPr>
-              <a:t>•  nRF Connect / nRF52840 dongle: app y hardware para escanear, interactuar y sniffear BLE. Característica: accesibles y bien documentados.</a:t>
-            </a:r>
-          </a:p>
-          <a:p>
-            <a:pPr>
-              <a:spcAft>
-                <a:spcPts val="600"/>
-              </a:spcAft>
-            </a:pPr>
-            <a:r>
-              <a:rPr sz="1500">
-                <a:solidFill>
-                  <a:srgbClr val="22282E"/>
-                </a:solidFill>
-              </a:rPr>
-              <a:t>•  bettercap (módulo BLE): framework que enumera y manipula dispositivos BLE. Característica: automatiza recon y escritura de características.</a:t>
+              <a:t>•  Hay dominio cuando el alumno vincula una operación GATT con estado de seguridad y decisión de aplicación, documenta la posición de captura, reconoce paquetes perdidos/cifrados y demuestra que un…</a:t>
             </a:r>
           </a:p>
         </p:txBody>
@@ -5192,22 +5327,22 @@
                   <a:srgbClr val="22282E"/>
                 </a:solidFill>
               </a:rPr>
-              <a:t>•  Adaptador BLE (interno o dongle CSR/nRF), nRF52840 dongle o Ubertooth One para sniffing.</a:t>
-            </a:r>
-          </a:p>
-          <a:p>
-            <a:pPr>
-              <a:spcAft>
-                <a:spcPts val="600"/>
-              </a:spcAft>
-            </a:pPr>
-            <a:r>
-              <a:rPr sz="1500">
-                <a:solidFill>
-                  <a:srgbClr val="22282E"/>
-                </a:solidFill>
-              </a:rPr>
-              <a:t>•  BlueZ (bluetoothctl, gatttool, hcitool), bettercap, nRF Connect (móvil/desktop), Wireshark.</a:t>
+              <a:t>•  Banco mínimo: periférico BLE educativo o app de ejemplo sobre placa propia; central en Linux/teléfono de prueba; Wireshark; BlueZ. Captura aérea opcional: placa compatible con nRF Sniffer y firmware…</a:t>
+            </a:r>
+          </a:p>
+          <a:p>
+            <a:pPr>
+              <a:spcAft>
+                <a:spcPts val="600"/>
+              </a:spcAft>
+            </a:pPr>
+            <a:r>
+              <a:rPr sz="1500">
+                <a:solidFill>
+                  <a:srgbClr val="22282E"/>
+                </a:solidFill>
+              </a:rPr>
+              <a:t>•  La salida contiene identificadores de terceros que estén al alcance; minimiza, filtra y elimina lo incidental. No publiques direcciones, nombres ni payloads sin necesidad y base legal.</a:t>
             </a:r>
           </a:p>
         </p:txBody>
